--- a/media/exports/reports/2026-02/volunteers.pptx
+++ b/media/exports/reports/2026-02/volunteers.pptx
@@ -200,7 +200,7 @@
                   <c:v>Volunteer coordinator</c:v>
                 </c:pt>
                 <c:pt idx="1">
-                  <c:v>Mental health first aid</c:v>
+                  <c:v>Youth outreach</c:v>
                 </c:pt>
                 <c:pt idx="2">
                   <c:v>Housing support</c:v>
@@ -209,10 +209,10 @@
                   <c:v>Digital literacy</c:v>
                 </c:pt>
                 <c:pt idx="4">
-                  <c:v>Community meals</c:v>
+                  <c:v>Mental health first aid</c:v>
                 </c:pt>
                 <c:pt idx="5">
-                  <c:v>Youth outreach</c:v>
+                  <c:v>Community meals</c:v>
                 </c:pt>
               </c:strCache>
             </c:strRef>
@@ -224,22 +224,22 @@
                 <c:formatCode>#,##0;[Red](#,##0)</c:formatCode>
                 <c:ptCount val="6"/>
                 <c:pt idx="0">
-                  <c:v>98.5</c:v>
+                  <c:v>48.0</c:v>
                 </c:pt>
                 <c:pt idx="1">
-                  <c:v>101.0</c:v>
+                  <c:v>128.5</c:v>
                 </c:pt>
                 <c:pt idx="2">
-                  <c:v>110.0</c:v>
+                  <c:v>135.5</c:v>
                 </c:pt>
                 <c:pt idx="3">
-                  <c:v>129.5</c:v>
+                  <c:v>146.5</c:v>
                 </c:pt>
                 <c:pt idx="4">
-                  <c:v>130.5</c:v>
+                  <c:v>158.5</c:v>
                 </c:pt>
                 <c:pt idx="5">
-                  <c:v>130.5</c:v>
+                  <c:v>164.0</c:v>
                 </c:pt>
               </c:numCache>
             </c:numRef>
@@ -303,7 +303,7 @@
       <c:valAx>
         <c:axId val="-2113994440"/>
         <c:scaling>
-          <c:max val="150.075"/>
+          <c:max val="188.6"/>
           <c:min val="0.0"/>
         </c:scaling>
         <c:delete/>
@@ -448,55 +448,55 @@
                 <c:formatCode>#,##0;[Red](#,##0)</c:formatCode>
                 <c:ptCount val="17"/>
                 <c:pt idx="0">
-                  <c:v>317.5</c:v>
+                  <c:v>381.0</c:v>
                 </c:pt>
                 <c:pt idx="1">
-                  <c:v>392.0</c:v>
+                  <c:v>373.5</c:v>
                 </c:pt>
                 <c:pt idx="2">
-                  <c:v>363.5</c:v>
+                  <c:v>383.5</c:v>
                 </c:pt>
                 <c:pt idx="3">
-                  <c:v>399.0</c:v>
+                  <c:v>387.5</c:v>
                 </c:pt>
                 <c:pt idx="4">
-                  <c:v>422.0</c:v>
+                  <c:v>376.5</c:v>
                 </c:pt>
                 <c:pt idx="5">
-                  <c:v>451.5</c:v>
+                  <c:v>444.0</c:v>
                 </c:pt>
                 <c:pt idx="6">
-                  <c:v>445.0</c:v>
+                  <c:v>422.5</c:v>
                 </c:pt>
                 <c:pt idx="7">
-                  <c:v>513.0</c:v>
+                  <c:v>562.0</c:v>
                 </c:pt>
                 <c:pt idx="8">
-                  <c:v>529.0</c:v>
+                  <c:v>568.0</c:v>
                 </c:pt>
                 <c:pt idx="9">
-                  <c:v>586.0</c:v>
+                  <c:v>609.5</c:v>
                 </c:pt>
                 <c:pt idx="10">
-                  <c:v>560.5</c:v>
+                  <c:v>627.0</c:v>
                 </c:pt>
                 <c:pt idx="11">
-                  <c:v>625.5</c:v>
+                  <c:v>708.5</c:v>
                 </c:pt>
                 <c:pt idx="12">
-                  <c:v>669.5</c:v>
+                  <c:v>817.0</c:v>
                 </c:pt>
                 <c:pt idx="13">
-                  <c:v>626.5</c:v>
+                  <c:v>780.5</c:v>
                 </c:pt>
                 <c:pt idx="14">
-                  <c:v>683.0</c:v>
+                  <c:v>830.5</c:v>
                 </c:pt>
                 <c:pt idx="15">
-                  <c:v>711.5</c:v>
+                  <c:v>817.5</c:v>
                 </c:pt>
                 <c:pt idx="16">
-                  <c:v>700.0</c:v>
+                  <c:v>781.0</c:v>
                 </c:pt>
               </c:numCache>
             </c:numRef>
@@ -545,7 +545,7 @@
         <c:axId val="-2100718248"/>
         <c:scaling>
           <c:orientation val="minMax"/>
-          <c:max val="800.0"/>
+          <c:max val="1000.0"/>
           <c:min val="0.0"/>
         </c:scaling>
         <c:delete val="0"/>
@@ -1070,7 +1070,7 @@
           <a:lstStyle/>
           <a:p>
             <a:r>
-              <a:t>How many volunteer hours go into each program?. Volunteer hours, February: 700.0 h; Volunteers who did a shift, February: 49; Hours per volunteer, February: 14.3 h; February last year: 422.0 h. 49 volunteers gave 700.0 h in February, against 711.5 h in January. Community meals drew the most (130.5 h, 18.6%). Volunteer coordinator had the fewest volunteer hours (98.5 h). Hours are up 65.9% on February last year.</a:t>
+              <a:t>How many volunteer hours go into each program?. Volunteer hours, February: 781.0 h; Volunteers who did a shift, February: 56; Hours per volunteer, February: 13.9 h; February last year: 376.5 h. 56 volunteers gave 781.0 h in February, against 817.5 h in January. Community meals drew the most (164.0 h, 21.0%). Volunteer coordinator had the fewest volunteer hours (48.0 h). Hours are up 107.4% on February last year.</a:t>
             </a:r>
           </a:p>
         </p:txBody>
@@ -4555,7 +4555,7 @@
                 </a:solidFill>
                 <a:latin typeface="Roboto"/>
               </a:rPr>
-              <a:t>Data retrieved 2pm, Tue 6 Oct 2026 · Generated 8 Oct 2026, 6:29pm · Sample data · Made with Python (python-pptx)</a:t>
+              <a:t>Data retrieved 2pm, Tue 6 Oct 2026 · Generated 8 Oct 2026, 11:41pm · Sample data · Made with Python (python-pptx)</a:t>
             </a:r>
           </a:p>
         </p:txBody>
@@ -4901,7 +4901,7 @@
                 </a:solidFill>
                 <a:latin typeface="Roboto"/>
               </a:rPr>
-              <a:t>700.0 h</a:t>
+              <a:t>781.0 h</a:t>
             </a:r>
           </a:p>
         </p:txBody>
@@ -4940,7 +4940,7 @@
                 </a:solidFill>
                 <a:latin typeface="Roboto"/>
               </a:rPr>
-              <a:t>January 711.5 h</a:t>
+              <a:t>January 817.5 h</a:t>
             </a:r>
           </a:p>
         </p:txBody>
@@ -5067,7 +5067,7 @@
                 </a:solidFill>
                 <a:latin typeface="Roboto"/>
               </a:rPr>
-              <a:t>49</a:t>
+              <a:t>56</a:t>
             </a:r>
           </a:p>
         </p:txBody>
@@ -5106,7 +5106,7 @@
                 </a:solidFill>
                 <a:latin typeface="Roboto"/>
               </a:rPr>
-              <a:t>January 48</a:t>
+              <a:t>January 55</a:t>
             </a:r>
           </a:p>
         </p:txBody>
@@ -5233,7 +5233,7 @@
                 </a:solidFill>
                 <a:latin typeface="Roboto"/>
               </a:rPr>
-              <a:t>14.3 h</a:t>
+              <a:t>13.9 h</a:t>
             </a:r>
           </a:p>
         </p:txBody>
@@ -5399,7 +5399,7 @@
                 </a:solidFill>
                 <a:latin typeface="Roboto"/>
               </a:rPr>
-              <a:t>422.0 h</a:t>
+              <a:t>376.5 h</a:t>
             </a:r>
           </a:p>
         </p:txBody>
@@ -5438,7 +5438,7 @@
                 </a:solidFill>
                 <a:latin typeface="Roboto"/>
               </a:rPr>
-              <a:t>31 volunteers</a:t>
+              <a:t>30 volunteers</a:t>
             </a:r>
           </a:p>
         </p:txBody>
@@ -5583,7 +5583,7 @@
                 </a:solidFill>
                 <a:latin typeface="Roboto"/>
               </a:rPr>
-              <a:t>49 volunteers gave 700.0 h in February, against 711.5 h in January. Community meals drew the most (130.5 h, 18.6%).</a:t>
+              <a:t>56 volunteers gave 781.0 h in February, against 817.5 h in January. Community meals drew the most (164.0 h, 21.0%).</a:t>
             </a:r>
           </a:p>
         </p:txBody>
@@ -5710,7 +5710,7 @@
                 </a:solidFill>
                 <a:latin typeface="Roboto"/>
               </a:rPr>
-              <a:t>Volunteer coordinator had the fewest volunteer hours (98.5 h). Hours are up 65.9% on February last year.</a:t>
+              <a:t>Volunteer coordinator had the fewest volunteer hours (48.0 h). Hours are up 107.4% on February last year.</a:t>
             </a:r>
           </a:p>
         </p:txBody>
@@ -5788,7 +5788,7 @@
                 </a:solidFill>
                 <a:latin typeface="Roboto"/>
               </a:rPr>
-              <a:t>Data retrieved 2pm, Tue 6 Oct 2026 · Generated 8 Oct 2026, 6:29pm · Sample data · Made with Python (python-pptx)</a:t>
+              <a:t>Data retrieved 2pm, Tue 6 Oct 2026 · Generated 8 Oct 2026, 11:41pm · Sample data · Made with Python (python-pptx)</a:t>
             </a:r>
           </a:p>
         </p:txBody>
@@ -6103,7 +6103,7 @@
                 </a:solidFill>
                 <a:latin typeface="Roboto"/>
               </a:rPr>
-              <a:t>Data retrieved 2pm, Tue 6 Oct 2026 · Generated 8 Oct 2026, 6:29pm · Sample data · Made with Python (python-pptx)</a:t>
+              <a:t>Data retrieved 2pm, Tue 6 Oct 2026 · Generated 8 Oct 2026, 11:41pm · Sample data · Made with Python (python-pptx)</a:t>
             </a:r>
           </a:p>
         </p:txBody>

--- a/media/exports/reports/2026-02/volunteers.pptx
+++ b/media/exports/reports/2026-02/volunteers.pptx
@@ -1000,7 +1000,7 @@
           <a:lstStyle/>
           <a:p>
             <a:r>
-              <a:t>How many volunteer hours go into each program?. Sample Community Services Ltd. Period: February 2026. Every volunteer shift: who (a code, not a name), which program, and how many hours.</a:t>
+              <a:t>How many volunteer hours go into each program?. Sample Community Services Ltd. Period: February 2026. In short: 781.0 h of volunteer time in February, from 56 volunteers; most went to Community meals. Every volunteer shift: who (a code, not a name), which program, and how many hours.</a:t>
             </a:r>
           </a:p>
         </p:txBody>
@@ -4365,7 +4365,7 @@
         <p:spPr>
           <a:xfrm>
             <a:off x="457200" y="3703320"/>
-            <a:ext cx="11277295" cy="313690"/>
+            <a:ext cx="11277295" cy="535940"/>
           </a:xfrm>
           <a:prstGeom prst="rect">
             <a:avLst/>
@@ -4390,7 +4390,7 @@
                 </a:solidFill>
                 <a:latin typeface="Roboto"/>
               </a:rPr>
-              <a:t>Period: February 2026. Every volunteer shift: who (a code, not a name), which program, and how many hours.</a:t>
+              <a:t>Period: February 2026. In short: 781.0 h of volunteer time in February, from 56 volunteers; most went to Community meals. Every volunteer shift: who (a code, not a name), which program, and how many hours.</a:t>
             </a:r>
           </a:p>
         </p:txBody>
@@ -4403,7 +4403,7 @@
         </p:nvSpPr>
         <p:spPr>
           <a:xfrm>
-            <a:off x="457200" y="4108450"/>
+            <a:off x="457200" y="4330700"/>
             <a:ext cx="11277295" cy="1097280"/>
           </a:xfrm>
           <a:prstGeom prst="rect">
@@ -4555,7 +4555,7 @@
                 </a:solidFill>
                 <a:latin typeface="Roboto"/>
               </a:rPr>
-              <a:t>Data retrieved 2pm, Tue 6 Oct 2026 · Generated 8 Oct 2026, 11:41pm · Sample data · Made with Python (python-pptx)</a:t>
+              <a:t>Data retrieved 2pm, Tue 6 Oct 2026 · Generated 10 Oct 2026, 9:55pm · Sample data · Made with Python (python-pptx)</a:t>
             </a:r>
           </a:p>
         </p:txBody>
@@ -5788,7 +5788,7 @@
                 </a:solidFill>
                 <a:latin typeface="Roboto"/>
               </a:rPr>
-              <a:t>Data retrieved 2pm, Tue 6 Oct 2026 · Generated 8 Oct 2026, 11:41pm · Sample data · Made with Python (python-pptx)</a:t>
+              <a:t>Data retrieved 2pm, Tue 6 Oct 2026 · Generated 10 Oct 2026, 9:55pm · Sample data · Made with Python (python-pptx)</a:t>
             </a:r>
           </a:p>
         </p:txBody>
@@ -6103,7 +6103,7 @@
                 </a:solidFill>
                 <a:latin typeface="Roboto"/>
               </a:rPr>
-              <a:t>Data retrieved 2pm, Tue 6 Oct 2026 · Generated 8 Oct 2026, 11:41pm · Sample data · Made with Python (python-pptx)</a:t>
+              <a:t>Data retrieved 2pm, Tue 6 Oct 2026 · Generated 10 Oct 2026, 9:55pm · Sample data · Made with Python (python-pptx)</a:t>
             </a:r>
           </a:p>
         </p:txBody>
